--- a/Week11/FinalDemo_slides/FinalDemo_1.pptx
+++ b/Week11/FinalDemo_slides/FinalDemo_1.pptx
@@ -243,7 +243,7 @@
           <a:p>
             <a:fld id="{A9407A57-47BC-45C1-B9EB-906F4463B0AB}" type="datetimeFigureOut">
               <a:rPr lang="en-AU" smtClean="0"/>
-              <a:t>3/10/2025</a:t>
+              <a:t>8/10/2025</a:t>
             </a:fld>
             <a:endParaRPr lang="en-AU"/>
           </a:p>
@@ -679,7 +679,7 @@
           <a:p>
             <a:fld id="{1205BC88-DBF0-4610-A802-A09E0A6ECD22}" type="datetimeFigureOut">
               <a:rPr lang="en-AU" smtClean="0"/>
-              <a:t>3/10/2025</a:t>
+              <a:t>8/10/2025</a:t>
             </a:fld>
             <a:endParaRPr lang="en-AU"/>
           </a:p>
@@ -914,7 +914,7 @@
           <a:p>
             <a:fld id="{1205BC88-DBF0-4610-A802-A09E0A6ECD22}" type="datetimeFigureOut">
               <a:rPr lang="en-AU" smtClean="0"/>
-              <a:t>3/10/2025</a:t>
+              <a:t>8/10/2025</a:t>
             </a:fld>
             <a:endParaRPr lang="en-AU"/>
           </a:p>
@@ -1094,7 +1094,7 @@
           <a:p>
             <a:fld id="{1205BC88-DBF0-4610-A802-A09E0A6ECD22}" type="datetimeFigureOut">
               <a:rPr lang="en-AU" smtClean="0"/>
-              <a:t>3/10/2025</a:t>
+              <a:t>8/10/2025</a:t>
             </a:fld>
             <a:endParaRPr lang="en-AU"/>
           </a:p>
@@ -1264,7 +1264,7 @@
           <a:p>
             <a:fld id="{1205BC88-DBF0-4610-A802-A09E0A6ECD22}" type="datetimeFigureOut">
               <a:rPr lang="en-AU" smtClean="0"/>
-              <a:t>3/10/2025</a:t>
+              <a:t>8/10/2025</a:t>
             </a:fld>
             <a:endParaRPr lang="en-AU"/>
           </a:p>
@@ -1518,7 +1518,7 @@
           <a:p>
             <a:fld id="{1205BC88-DBF0-4610-A802-A09E0A6ECD22}" type="datetimeFigureOut">
               <a:rPr lang="en-AU" smtClean="0"/>
-              <a:t>3/10/2025</a:t>
+              <a:t>8/10/2025</a:t>
             </a:fld>
             <a:endParaRPr lang="en-AU"/>
           </a:p>
@@ -1844,7 +1844,7 @@
           <a:p>
             <a:fld id="{1205BC88-DBF0-4610-A802-A09E0A6ECD22}" type="datetimeFigureOut">
               <a:rPr lang="en-AU" smtClean="0"/>
-              <a:t>3/10/2025</a:t>
+              <a:t>8/10/2025</a:t>
             </a:fld>
             <a:endParaRPr lang="en-AU"/>
           </a:p>
@@ -2295,7 +2295,7 @@
           <a:p>
             <a:fld id="{1205BC88-DBF0-4610-A802-A09E0A6ECD22}" type="datetimeFigureOut">
               <a:rPr lang="en-AU" smtClean="0"/>
-              <a:t>3/10/2025</a:t>
+              <a:t>8/10/2025</a:t>
             </a:fld>
             <a:endParaRPr lang="en-AU"/>
           </a:p>
@@ -2413,7 +2413,7 @@
           <a:p>
             <a:fld id="{1205BC88-DBF0-4610-A802-A09E0A6ECD22}" type="datetimeFigureOut">
               <a:rPr lang="en-AU" smtClean="0"/>
-              <a:t>3/10/2025</a:t>
+              <a:t>8/10/2025</a:t>
             </a:fld>
             <a:endParaRPr lang="en-AU"/>
           </a:p>
@@ -2508,7 +2508,7 @@
           <a:p>
             <a:fld id="{1205BC88-DBF0-4610-A802-A09E0A6ECD22}" type="datetimeFigureOut">
               <a:rPr lang="en-AU" smtClean="0"/>
-              <a:t>3/10/2025</a:t>
+              <a:t>8/10/2025</a:t>
             </a:fld>
             <a:endParaRPr lang="en-AU"/>
           </a:p>
@@ -2795,7 +2795,7 @@
           <a:p>
             <a:fld id="{1205BC88-DBF0-4610-A802-A09E0A6ECD22}" type="datetimeFigureOut">
               <a:rPr lang="en-AU" smtClean="0"/>
-              <a:t>3/10/2025</a:t>
+              <a:t>8/10/2025</a:t>
             </a:fld>
             <a:endParaRPr lang="en-AU"/>
           </a:p>
@@ -3117,7 +3117,7 @@
           <a:p>
             <a:fld id="{1205BC88-DBF0-4610-A802-A09E0A6ECD22}" type="datetimeFigureOut">
               <a:rPr lang="en-AU" smtClean="0"/>
-              <a:t>3/10/2025</a:t>
+              <a:t>8/10/2025</a:t>
             </a:fld>
             <a:endParaRPr lang="en-AU"/>
           </a:p>
@@ -3378,7 +3378,7 @@
           <a:p>
             <a:fld id="{1205BC88-DBF0-4610-A802-A09E0A6ECD22}" type="datetimeFigureOut">
               <a:rPr lang="en-AU" smtClean="0"/>
-              <a:t>3/10/2025</a:t>
+              <a:t>8/10/2025</a:t>
             </a:fld>
             <a:endParaRPr lang="en-AU"/>
           </a:p>
@@ -8414,8 +8414,8 @@
           </a:p>
         </p:txBody>
       </p:sp>
-      <mc:AlternateContent xmlns:mc="http://schemas.openxmlformats.org/markup-compatibility/2006" xmlns:a14="http://schemas.microsoft.com/office/drawing/2010/main">
-        <mc:Choice Requires="a14">
+      <mc:AlternateContent xmlns:mc="http://schemas.openxmlformats.org/markup-compatibility/2006">
+        <mc:Choice xmlns:a14="http://schemas.microsoft.com/office/drawing/2010/main" Requires="a14">
           <p:sp>
             <p:nvSpPr>
               <p:cNvPr id="5" name="TextBox 4">
@@ -8431,7 +8431,7 @@
             <p:spPr>
               <a:xfrm>
                 <a:off x="478180" y="838376"/>
-                <a:ext cx="11588314" cy="7365093"/>
+                <a:ext cx="11588314" cy="5826852"/>
               </a:xfrm>
               <a:prstGeom prst="rect">
                 <a:avLst/>
@@ -8451,6 +8451,228 @@
                   <a:rPr lang="en-US" sz="1600" dirty="0"/>
                   <a:t>Mapping (30 points):</a:t>
                 </a:r>
+              </a:p>
+              <a:p>
+                <a:pPr algn="ctr"/>
+                <a:r>
+                  <a:rPr lang="en-GB" sz="1600" dirty="0" err="1"/>
+                  <a:t>slam_rating</a:t>
+                </a:r>
+                <a:r>
+                  <a:rPr lang="en-GB" sz="1600" dirty="0"/>
+                  <a:t>= </a:t>
+                </a:r>
+                <a14:m>
+                  <m:oMath xmlns:m="http://schemas.openxmlformats.org/officeDocument/2006/math">
+                    <m:f>
+                      <m:fPr>
+                        <m:ctrlPr>
+                          <a:rPr lang="en-GB" sz="1600" i="1" dirty="0">
+                            <a:latin typeface="Cambria Math" panose="02040503050406030204" pitchFamily="18" charset="0"/>
+                          </a:rPr>
+                        </m:ctrlPr>
+                      </m:fPr>
+                      <m:num>
+                        <m:r>
+                          <a:rPr lang="en-GB" sz="1600" i="1" dirty="0">
+                            <a:latin typeface="Cambria Math" panose="02040503050406030204" pitchFamily="18" charset="0"/>
+                          </a:rPr>
+                          <m:t>0.</m:t>
+                        </m:r>
+                        <m:r>
+                          <a:rPr lang="en-AU" sz="1600" b="0" i="1" dirty="0" smtClean="0">
+                            <a:latin typeface="Cambria Math" panose="02040503050406030204" pitchFamily="18" charset="0"/>
+                          </a:rPr>
+                          <m:t>2</m:t>
+                        </m:r>
+                        <m:r>
+                          <a:rPr lang="en-GB" sz="1600" i="1" dirty="0">
+                            <a:latin typeface="Cambria Math" panose="02040503050406030204" pitchFamily="18" charset="0"/>
+                          </a:rPr>
+                          <m:t> −</m:t>
+                        </m:r>
+                        <m:r>
+                          <a:rPr lang="en-AU" sz="1600" b="0" i="1" dirty="0" smtClean="0">
+                            <a:latin typeface="Cambria Math" panose="02040503050406030204" pitchFamily="18" charset="0"/>
+                          </a:rPr>
+                          <m:t>𝑠𝑙𝑎𝑚</m:t>
+                        </m:r>
+                        <m:r>
+                          <a:rPr lang="en-AU" sz="1600" i="1" dirty="0">
+                            <a:latin typeface="Cambria Math" panose="02040503050406030204" pitchFamily="18" charset="0"/>
+                          </a:rPr>
+                          <m:t>_</m:t>
+                        </m:r>
+                        <m:r>
+                          <a:rPr lang="en-AU" sz="1600" b="0" i="1" dirty="0" smtClean="0">
+                            <a:latin typeface="Cambria Math" panose="02040503050406030204" pitchFamily="18" charset="0"/>
+                          </a:rPr>
+                          <m:t>𝑟𝑚𝑠𝑒</m:t>
+                        </m:r>
+                      </m:num>
+                      <m:den>
+                        <m:r>
+                          <a:rPr lang="en-GB" sz="1600" i="1" dirty="0">
+                            <a:latin typeface="Cambria Math" panose="02040503050406030204" pitchFamily="18" charset="0"/>
+                          </a:rPr>
+                          <m:t>0.</m:t>
+                        </m:r>
+                        <m:r>
+                          <a:rPr lang="en-AU" sz="1600" b="0" i="1" dirty="0" smtClean="0">
+                            <a:latin typeface="Cambria Math" panose="02040503050406030204" pitchFamily="18" charset="0"/>
+                          </a:rPr>
+                          <m:t>2</m:t>
+                        </m:r>
+                        <m:r>
+                          <a:rPr lang="en-GB" sz="1600" i="1" dirty="0">
+                            <a:latin typeface="Cambria Math" panose="02040503050406030204" pitchFamily="18" charset="0"/>
+                          </a:rPr>
+                          <m:t>−0.02</m:t>
+                        </m:r>
+                      </m:den>
+                    </m:f>
+                    <m:r>
+                      <a:rPr lang="en-GB" sz="1600" i="1" dirty="0">
+                        <a:latin typeface="Cambria Math" panose="02040503050406030204" pitchFamily="18" charset="0"/>
+                      </a:rPr>
+                      <m:t> </m:t>
+                    </m:r>
+                  </m:oMath>
+                </a14:m>
+                <a:endParaRPr lang="en-GB" sz="1600" dirty="0">
+                  <a:solidFill>
+                    <a:srgbClr val="FFFF00"/>
+                  </a:solidFill>
+                </a:endParaRPr>
+              </a:p>
+              <a:p>
+                <a:pPr algn="ctr"/>
+                <a:r>
+                  <a:rPr lang="en-GB" sz="1600" dirty="0"/>
+                  <a:t>slam _score = </a:t>
+                </a:r>
+                <a14:m>
+                  <m:oMath xmlns:m="http://schemas.openxmlformats.org/officeDocument/2006/math">
+                    <m:f>
+                      <m:fPr>
+                        <m:ctrlPr>
+                          <a:rPr lang="en-GB" sz="1600" i="1" dirty="0">
+                            <a:latin typeface="Cambria Math" panose="02040503050406030204" pitchFamily="18" charset="0"/>
+                          </a:rPr>
+                        </m:ctrlPr>
+                      </m:fPr>
+                      <m:num>
+                        <m:r>
+                          <a:rPr lang="en-GB" sz="1600" i="1" dirty="0" err="1">
+                            <a:latin typeface="Cambria Math" panose="02040503050406030204" pitchFamily="18" charset="0"/>
+                          </a:rPr>
+                          <m:t>𝑏𝑎𝑠</m:t>
+                        </m:r>
+                        <m:sSup>
+                          <m:sSupPr>
+                            <m:ctrlPr>
+                              <a:rPr lang="en-GB" sz="1600" i="1" dirty="0" err="1">
+                                <a:latin typeface="Cambria Math" panose="02040503050406030204" pitchFamily="18" charset="0"/>
+                              </a:rPr>
+                            </m:ctrlPr>
+                          </m:sSupPr>
+                          <m:e>
+                            <m:r>
+                              <a:rPr lang="en-GB" sz="1600" i="1" dirty="0" err="1">
+                                <a:latin typeface="Cambria Math" panose="02040503050406030204" pitchFamily="18" charset="0"/>
+                              </a:rPr>
+                              <m:t>𝑒</m:t>
+                            </m:r>
+                          </m:e>
+                          <m:sup>
+                            <m:r>
+                              <a:rPr lang="en-AU" sz="1600" b="0" i="1" dirty="0" smtClean="0">
+                                <a:latin typeface="Cambria Math" panose="02040503050406030204" pitchFamily="18" charset="0"/>
+                              </a:rPr>
+                              <m:t>𝑠𝑙𝑎𝑚</m:t>
+                            </m:r>
+                            <m:r>
+                              <a:rPr lang="en-AU" sz="1600" b="0" i="1" dirty="0" smtClean="0">
+                                <a:latin typeface="Cambria Math" panose="02040503050406030204" pitchFamily="18" charset="0"/>
+                              </a:rPr>
+                              <m:t>_</m:t>
+                            </m:r>
+                            <m:r>
+                              <a:rPr lang="en-AU" sz="1600" b="0" i="1" dirty="0" smtClean="0">
+                                <a:latin typeface="Cambria Math" panose="02040503050406030204" pitchFamily="18" charset="0"/>
+                              </a:rPr>
+                              <m:t>𝑟𝑎𝑡𝑖𝑛𝑔</m:t>
+                            </m:r>
+                          </m:sup>
+                        </m:sSup>
+                        <m:r>
+                          <a:rPr lang="en-GB" sz="1600" i="1" dirty="0">
+                            <a:latin typeface="Cambria Math" panose="02040503050406030204" pitchFamily="18" charset="0"/>
+                          </a:rPr>
+                          <m:t>– 1</m:t>
+                        </m:r>
+                      </m:num>
+                      <m:den>
+                        <m:r>
+                          <a:rPr lang="en-GB" sz="1600" i="1" dirty="0">
+                            <a:latin typeface="Cambria Math" panose="02040503050406030204" pitchFamily="18" charset="0"/>
+                          </a:rPr>
+                          <m:t>𝑏𝑎𝑠𝑒</m:t>
+                        </m:r>
+                        <m:r>
+                          <a:rPr lang="en-GB" sz="1600" i="1" dirty="0">
+                            <a:latin typeface="Cambria Math" panose="02040503050406030204" pitchFamily="18" charset="0"/>
+                          </a:rPr>
+                          <m:t> – 1</m:t>
+                        </m:r>
+                      </m:den>
+                    </m:f>
+                    <m:r>
+                      <a:rPr lang="en-GB" sz="1600" i="1" dirty="0">
+                        <a:latin typeface="Cambria Math" panose="02040503050406030204" pitchFamily="18" charset="0"/>
+                      </a:rPr>
+                      <m:t> ∗</m:t>
+                    </m:r>
+                    <m:r>
+                      <a:rPr lang="en-AU" sz="1600" i="1" dirty="0">
+                        <a:latin typeface="Cambria Math" panose="02040503050406030204" pitchFamily="18" charset="0"/>
+                      </a:rPr>
+                      <m:t>15 ∗</m:t>
+                    </m:r>
+                    <m:f>
+                      <m:fPr>
+                        <m:ctrlPr>
+                          <a:rPr lang="en-AU" sz="1600" i="1" dirty="0">
+                            <a:latin typeface="Cambria Math" panose="02040503050406030204" pitchFamily="18" charset="0"/>
+                          </a:rPr>
+                        </m:ctrlPr>
+                      </m:fPr>
+                      <m:num>
+                        <m:r>
+                          <a:rPr lang="en-AU" sz="1600" i="1" dirty="0">
+                            <a:latin typeface="Cambria Math" panose="02040503050406030204" pitchFamily="18" charset="0"/>
+                          </a:rPr>
+                          <m:t>𝑁𝑢𝑚𝑏𝑒𝑟𝑂𝑓𝐹𝑜𝑢𝑛𝑑𝑀𝑎𝑟𝑘𝑒𝑟𝑠</m:t>
+                        </m:r>
+                      </m:num>
+                      <m:den>
+                        <m:r>
+                          <a:rPr lang="en-AU" sz="1600" i="1" dirty="0">
+                            <a:latin typeface="Cambria Math" panose="02040503050406030204" pitchFamily="18" charset="0"/>
+                          </a:rPr>
+                          <m:t>𝑁𝑢𝑚𝑏𝑒𝑟𝑂𝑓𝑀𝑎𝑟𝑘𝑒𝑟𝑠</m:t>
+                        </m:r>
+                      </m:den>
+                    </m:f>
+                  </m:oMath>
+                </a14:m>
+                <a:r>
+                  <a:rPr lang="en-GB" sz="1600" dirty="0"/>
+                  <a:t>, base = 16</a:t>
+                </a:r>
+              </a:p>
+              <a:p>
+                <a:endParaRPr lang="en-US" sz="1600" dirty="0"/>
               </a:p>
               <a:p>
                 <a:r>
@@ -8473,12 +8695,6 @@
                   <a:rPr lang="en-US" sz="1600" dirty="0"/>
                   <a:t> ≤ 15pt): </a:t>
                 </a:r>
-              </a:p>
-              <a:p>
-                <a:endParaRPr lang="en-US" sz="1600" dirty="0"/>
-              </a:p>
-              <a:p>
-                <a:endParaRPr lang="en-US" sz="1600" dirty="0"/>
               </a:p>
               <a:p>
                 <a:r>
@@ -8811,21 +9027,8 @@
                       <a:schemeClr val="tx1"/>
                     </a:solidFill>
                   </a:rPr>
-                  <a:t>Example submission folder structure format (Please read the marking instructions </a:t>
+                  <a:t>Example submission folder structure format (Please read the marking instructions carefully for this!):</a:t>
                 </a:r>
-                <a:r>
-                  <a:rPr lang="en-GB" sz="1600">
-                    <a:solidFill>
-                      <a:schemeClr val="tx1"/>
-                    </a:solidFill>
-                  </a:rPr>
-                  <a:t>carefully for this!):</a:t>
-                </a:r>
-                <a:endParaRPr lang="en-GB" sz="1600" dirty="0">
-                  <a:solidFill>
-                    <a:schemeClr val="tx1"/>
-                  </a:solidFill>
-                </a:endParaRPr>
               </a:p>
               <a:p>
                 <a:r>
@@ -8874,39 +9077,12 @@
                   <a:rPr lang="en-AU" dirty="0"/>
                   <a:t>│   ├── targets_manual_2.txt </a:t>
                 </a:r>
-              </a:p>
-              <a:p>
-                <a:endParaRPr lang="en-GB" sz="1400" dirty="0"/>
-              </a:p>
-              <a:p>
-                <a:br>
-                  <a:rPr lang="en-GB" dirty="0"/>
-                </a:br>
-                <a:endParaRPr lang="en-GB" dirty="0"/>
-              </a:p>
-              <a:p>
-                <a:pPr algn="ctr"/>
-                <a:endParaRPr lang="en-GB" sz="1600" dirty="0">
-                  <a:solidFill>
-                    <a:schemeClr val="tx1"/>
-                  </a:solidFill>
-                </a:endParaRPr>
-              </a:p>
-              <a:p>
-                <a:pPr algn="ctr"/>
-                <a:endParaRPr lang="en-US" sz="1600" dirty="0">
-                  <a:solidFill>
-                    <a:schemeClr val="tx1"/>
-                  </a:solidFill>
-                </a:endParaRPr>
-              </a:p>
-              <a:p>
                 <a:endParaRPr lang="en-US" sz="1600" dirty="0"/>
               </a:p>
             </p:txBody>
           </p:sp>
         </mc:Choice>
-        <mc:Fallback xmlns="">
+        <mc:Fallback>
           <p:sp>
             <p:nvSpPr>
               <p:cNvPr id="5" name="TextBox 4">
@@ -8924,7 +9100,7 @@
             <p:spPr>
               <a:xfrm>
                 <a:off x="478180" y="838376"/>
-                <a:ext cx="11588314" cy="7365093"/>
+                <a:ext cx="11588314" cy="5826852"/>
               </a:xfrm>
               <a:prstGeom prst="rect">
                 <a:avLst/>
@@ -8932,7 +9108,7 @@
               <a:blipFill>
                 <a:blip r:embed="rId2"/>
                 <a:stretch>
-                  <a:fillRect l="-421"/>
+                  <a:fillRect l="-421" b="-838"/>
                 </a:stretch>
               </a:blipFill>
             </p:spPr>
